--- a/10-plantas/01-steelmaking/05-capacitacion/MM-GR-01/MM-GR-01_Capacitacion_AMMX.pptx
+++ b/10-plantas/01-steelmaking/05-capacitacion/MM-GR-01/MM-GR-01_Capacitacion_AMMX.pptx
@@ -3493,7 +3493,7 @@
                 <a:ea typeface="Century Gothic" pitchFamily="34" charset="-122"/>
                 <a:cs typeface="Century Gothic" pitchFamily="34" charset="-120"/>
               </a:rPr>
-              <a:t>Para: S-19 Mecánico · S-20 Electricista · S-09 Operador de Grúa de Colada · S-26 Lubricador · C-11 · C-04</a:t>
+              <a:t>Para: S-19 Mecánico · S-20 Electricista · S-09 Operador de Grúa de Colada · S-26 Lubricador · S-23 Soldador · C-11 · C-04</a:t>
             </a:r>
             <a:endParaRPr lang="en-US" sz="1100" dirty="0"/>
           </a:p>
@@ -17407,7 +17407,7 @@
                 <a:ea typeface="Calibri" pitchFamily="34" charset="-122"/>
                 <a:cs typeface="Calibri" pitchFamily="34" charset="-120"/>
               </a:rPr>
-              <a:t>Siguiente paso: OJT supervisado y evaluación práctica (TD-P07); registro en IMaS y DC-3/SIRCE. Validación: pendiente.</a:t>
+              <a:t>Siguiente paso: OJT supervisado y evaluación práctica (TD-P07); registro en IMaS y DC-3/SIRCE. Validación: visto bueno técnica, seguridad, laboral, diseño instruccional.</a:t>
             </a:r>
             <a:endParaRPr lang="en-US" sz="750" dirty="0"/>
           </a:p>
@@ -30483,7 +30483,7 @@
                           <a:ea typeface="Century Gothic" pitchFamily="34" charset="-122"/>
                           <a:cs typeface="Century Gothic" pitchFamily="34" charset="-120"/>
                         </a:rPr>
-                        <a:t>Sobrecalentamiento fuera de 20–30 °C</a:t>
+                        <a:t>Sobrecalentamiento fuera de 20–30 °C en CC1</a:t>
                       </a:r>
                       <a:endParaRPr lang="en-US" sz="1050" dirty="0">
                         <a:latin typeface="Century Gothic" charset="0"/>
